--- a/ClassMaterials/MapsAndObjectIntro/Slides/Part1-ObjectIntro.pptx
+++ b/ClassMaterials/MapsAndObjectIntro/Slides/Part1-ObjectIntro.pptx
@@ -5,21 +5,20 @@
     <p:sldMasterId id="2147483648" r:id="rId4"/>
   </p:sldMasterIdLst>
   <p:notesMasterIdLst>
-    <p:notesMasterId r:id="rId17"/>
+    <p:notesMasterId r:id="rId16"/>
   </p:notesMasterIdLst>
   <p:sldIdLst>
     <p:sldId id="256" r:id="rId5"/>
-    <p:sldId id="311" r:id="rId6"/>
-    <p:sldId id="277" r:id="rId7"/>
-    <p:sldId id="278" r:id="rId8"/>
-    <p:sldId id="308" r:id="rId9"/>
-    <p:sldId id="279" r:id="rId10"/>
-    <p:sldId id="280" r:id="rId11"/>
-    <p:sldId id="297" r:id="rId12"/>
-    <p:sldId id="295" r:id="rId13"/>
-    <p:sldId id="296" r:id="rId14"/>
-    <p:sldId id="310" r:id="rId15"/>
-    <p:sldId id="309" r:id="rId16"/>
+    <p:sldId id="277" r:id="rId6"/>
+    <p:sldId id="278" r:id="rId7"/>
+    <p:sldId id="308" r:id="rId8"/>
+    <p:sldId id="279" r:id="rId9"/>
+    <p:sldId id="280" r:id="rId10"/>
+    <p:sldId id="297" r:id="rId11"/>
+    <p:sldId id="295" r:id="rId12"/>
+    <p:sldId id="296" r:id="rId13"/>
+    <p:sldId id="310" r:id="rId14"/>
+    <p:sldId id="309" r:id="rId15"/>
   </p:sldIdLst>
   <p:sldSz cx="9144000" cy="6858000" type="screen4x3"/>
   <p:notesSz cx="6858000" cy="9144000"/>
@@ -710,7 +709,7 @@
           <a:p>
             <a:fld id="{73386005-8F80-1A49-87D1-22EBFA47E352}" type="datetimeFigureOut">
               <a:rPr lang="en-US" smtClean="0"/>
-              <a:t>4/22/2025</a:t>
+              <a:t>9/11/2026</a:t>
             </a:fld>
             <a:endParaRPr lang="en-US"/>
           </a:p>
@@ -1048,7 +1047,7 @@
               <a:pPr>
                 <a:defRPr/>
               </a:pPr>
-              <a:t>3</a:t>
+              <a:t>2</a:t>
             </a:fld>
             <a:endParaRPr lang="en-US"/>
           </a:p>
@@ -1150,7 +1149,7 @@
                 <a:cs typeface="Arial" pitchFamily="34" charset="0"/>
               </a:rPr>
               <a:pPr/>
-              <a:t>5</a:t>
+              <a:t>4</a:t>
             </a:fld>
             <a:endParaRPr lang="en-US">
               <a:cs typeface="Arial" pitchFamily="34" charset="0"/>
@@ -1242,7 +1241,7 @@
               <a:pPr>
                 <a:defRPr/>
               </a:pPr>
-              <a:t>6</a:t>
+              <a:t>5</a:t>
             </a:fld>
             <a:endParaRPr lang="en-US"/>
           </a:p>
@@ -1574,7 +1573,7 @@
           <a:p>
             <a:fld id="{5B07E745-2C70-2943-8487-A8F6E88ADF5E}" type="datetimeFigureOut">
               <a:rPr lang="en-US" smtClean="0"/>
-              <a:t>4/22/2025</a:t>
+              <a:t>9/11/2026</a:t>
             </a:fld>
             <a:endParaRPr lang="en-US"/>
           </a:p>
@@ -1742,7 +1741,7 @@
           <a:p>
             <a:fld id="{5B07E745-2C70-2943-8487-A8F6E88ADF5E}" type="datetimeFigureOut">
               <a:rPr lang="en-US" smtClean="0"/>
-              <a:t>4/22/2025</a:t>
+              <a:t>9/11/2026</a:t>
             </a:fld>
             <a:endParaRPr lang="en-US"/>
           </a:p>
@@ -1920,7 +1919,7 @@
           <a:p>
             <a:fld id="{5B07E745-2C70-2943-8487-A8F6E88ADF5E}" type="datetimeFigureOut">
               <a:rPr lang="en-US" smtClean="0"/>
-              <a:t>4/22/2025</a:t>
+              <a:t>9/11/2026</a:t>
             </a:fld>
             <a:endParaRPr lang="en-US"/>
           </a:p>
@@ -2088,7 +2087,7 @@
           <a:p>
             <a:fld id="{5B07E745-2C70-2943-8487-A8F6E88ADF5E}" type="datetimeFigureOut">
               <a:rPr lang="en-US" smtClean="0"/>
-              <a:t>4/22/2025</a:t>
+              <a:t>9/11/2026</a:t>
             </a:fld>
             <a:endParaRPr lang="en-US"/>
           </a:p>
@@ -2333,7 +2332,7 @@
           <a:p>
             <a:fld id="{5B07E745-2C70-2943-8487-A8F6E88ADF5E}" type="datetimeFigureOut">
               <a:rPr lang="en-US" smtClean="0"/>
-              <a:t>4/22/2025</a:t>
+              <a:t>9/11/2026</a:t>
             </a:fld>
             <a:endParaRPr lang="en-US"/>
           </a:p>
@@ -2618,7 +2617,7 @@
           <a:p>
             <a:fld id="{5B07E745-2C70-2943-8487-A8F6E88ADF5E}" type="datetimeFigureOut">
               <a:rPr lang="en-US" smtClean="0"/>
-              <a:t>4/22/2025</a:t>
+              <a:t>9/11/2026</a:t>
             </a:fld>
             <a:endParaRPr lang="en-US"/>
           </a:p>
@@ -3037,7 +3036,7 @@
           <a:p>
             <a:fld id="{5B07E745-2C70-2943-8487-A8F6E88ADF5E}" type="datetimeFigureOut">
               <a:rPr lang="en-US" smtClean="0"/>
-              <a:t>4/22/2025</a:t>
+              <a:t>9/11/2026</a:t>
             </a:fld>
             <a:endParaRPr lang="en-US"/>
           </a:p>
@@ -3154,7 +3153,7 @@
           <a:p>
             <a:fld id="{5B07E745-2C70-2943-8487-A8F6E88ADF5E}" type="datetimeFigureOut">
               <a:rPr lang="en-US" smtClean="0"/>
-              <a:t>4/22/2025</a:t>
+              <a:t>9/11/2026</a:t>
             </a:fld>
             <a:endParaRPr lang="en-US"/>
           </a:p>
@@ -3249,7 +3248,7 @@
           <a:p>
             <a:fld id="{5B07E745-2C70-2943-8487-A8F6E88ADF5E}" type="datetimeFigureOut">
               <a:rPr lang="en-US" smtClean="0"/>
-              <a:t>4/22/2025</a:t>
+              <a:t>9/11/2026</a:t>
             </a:fld>
             <a:endParaRPr lang="en-US"/>
           </a:p>
@@ -3524,7 +3523,7 @@
           <a:p>
             <a:fld id="{5B07E745-2C70-2943-8487-A8F6E88ADF5E}" type="datetimeFigureOut">
               <a:rPr lang="en-US" smtClean="0"/>
-              <a:t>4/22/2025</a:t>
+              <a:t>9/11/2026</a:t>
             </a:fld>
             <a:endParaRPr lang="en-US"/>
           </a:p>
@@ -3776,7 +3775,7 @@
           <a:p>
             <a:fld id="{5B07E745-2C70-2943-8487-A8F6E88ADF5E}" type="datetimeFigureOut">
               <a:rPr lang="en-US" smtClean="0"/>
-              <a:t>4/22/2025</a:t>
+              <a:t>9/11/2026</a:t>
             </a:fld>
             <a:endParaRPr lang="en-US"/>
           </a:p>
@@ -3987,7 +3986,7 @@
           <a:p>
             <a:fld id="{5B07E745-2C70-2943-8487-A8F6E88ADF5E}" type="datetimeFigureOut">
               <a:rPr lang="en-US" smtClean="0"/>
-              <a:t>4/22/2025</a:t>
+              <a:t>9/11/2026</a:t>
             </a:fld>
             <a:endParaRPr lang="en-US"/>
           </a:p>
@@ -4374,8 +4373,8 @@
         </p:nvSpPr>
         <p:spPr>
           <a:xfrm>
-            <a:off x="85165" y="769771"/>
-            <a:ext cx="5442857" cy="1470025"/>
+            <a:off x="1850571" y="1268534"/>
+            <a:ext cx="5442857" cy="2492975"/>
           </a:xfrm>
         </p:spPr>
         <p:txBody>
@@ -4388,6 +4387,17 @@
               <a:rPr lang="en-US" sz="4800" b="1" dirty="0"/>
               <a:t>Object Introduction</a:t>
             </a:r>
+            <a:br>
+              <a:rPr lang="en-US" sz="4800" b="1" dirty="0"/>
+            </a:br>
+            <a:br>
+              <a:rPr lang="en-US" sz="4800" b="1" dirty="0"/>
+            </a:br>
+            <a:r>
+              <a:rPr lang="en-US" sz="4800" i="1" dirty="0" err="1"/>
+              <a:t>MapsAndObjectIntro</a:t>
+            </a:r>
+            <a:endParaRPr lang="en-US" sz="4800" b="1" dirty="0"/>
           </a:p>
         </p:txBody>
       </p:sp>
@@ -4481,164 +4491,6 @@
           </a:p>
         </p:txBody>
       </p:sp>
-      <p:pic>
-        <p:nvPicPr>
-          <p:cNvPr id="15" name="Picture 14">
-            <a:extLst>
-              <a:ext uri="{FF2B5EF4-FFF2-40B4-BE49-F238E27FC236}">
-                <a16:creationId xmlns:a16="http://schemas.microsoft.com/office/drawing/2014/main" id="{6FEC76AD-DF1D-26CD-0792-73ABDFDB313B}"/>
-              </a:ext>
-            </a:extLst>
-          </p:cNvPr>
-          <p:cNvPicPr>
-            <a:picLocks noChangeAspect="1"/>
-          </p:cNvPicPr>
-          <p:nvPr/>
-        </p:nvPicPr>
-        <p:blipFill>
-          <a:blip r:embed="rId2"/>
-          <a:stretch>
-            <a:fillRect/>
-          </a:stretch>
-        </p:blipFill>
-        <p:spPr>
-          <a:xfrm>
-            <a:off x="6242209" y="0"/>
-            <a:ext cx="2816626" cy="2439173"/>
-          </a:xfrm>
-          <a:prstGeom prst="rect">
-            <a:avLst/>
-          </a:prstGeom>
-        </p:spPr>
-      </p:pic>
-      <p:pic>
-        <p:nvPicPr>
-          <p:cNvPr id="4" name="Picture 3">
-            <a:extLst>
-              <a:ext uri="{FF2B5EF4-FFF2-40B4-BE49-F238E27FC236}">
-                <a16:creationId xmlns:a16="http://schemas.microsoft.com/office/drawing/2014/main" id="{4DAD9B0C-F178-6FB8-1FD2-DC381674EBD2}"/>
-              </a:ext>
-            </a:extLst>
-          </p:cNvPr>
-          <p:cNvPicPr>
-            <a:picLocks noChangeAspect="1"/>
-          </p:cNvPicPr>
-          <p:nvPr/>
-        </p:nvPicPr>
-        <p:blipFill>
-          <a:blip r:embed="rId3"/>
-          <a:stretch>
-            <a:fillRect/>
-          </a:stretch>
-        </p:blipFill>
-        <p:spPr>
-          <a:xfrm>
-            <a:off x="217035" y="2239796"/>
-            <a:ext cx="5606823" cy="2877270"/>
-          </a:xfrm>
-          <a:prstGeom prst="rect">
-            <a:avLst/>
-          </a:prstGeom>
-        </p:spPr>
-      </p:pic>
-      <p:sp>
-        <p:nvSpPr>
-          <p:cNvPr id="6" name="TextBox 5">
-            <a:extLst>
-              <a:ext uri="{FF2B5EF4-FFF2-40B4-BE49-F238E27FC236}">
-                <a16:creationId xmlns:a16="http://schemas.microsoft.com/office/drawing/2014/main" id="{65DF5BD7-BC92-FC6C-4901-D7709A516D95}"/>
-              </a:ext>
-            </a:extLst>
-          </p:cNvPr>
-          <p:cNvSpPr txBox="1"/>
-          <p:nvPr/>
-        </p:nvSpPr>
-        <p:spPr>
-          <a:xfrm>
-            <a:off x="6335486" y="3058886"/>
-            <a:ext cx="1894114" cy="646331"/>
-          </a:xfrm>
-          <a:prstGeom prst="rect">
-            <a:avLst/>
-          </a:prstGeom>
-          <a:noFill/>
-        </p:spPr>
-        <p:txBody>
-          <a:bodyPr wrap="square" rtlCol="0">
-            <a:spAutoFit/>
-          </a:bodyPr>
-          <a:lstStyle/>
-          <a:p>
-            <a:r>
-              <a:rPr lang="en-US" b="1" i="1" dirty="0"/>
-              <a:t>I updated some slides for today</a:t>
-            </a:r>
-          </a:p>
-        </p:txBody>
-      </p:sp>
-      <p:sp>
-        <p:nvSpPr>
-          <p:cNvPr id="3" name="Shape 54">
-            <a:extLst>
-              <a:ext uri="{FF2B5EF4-FFF2-40B4-BE49-F238E27FC236}">
-                <a16:creationId xmlns:a16="http://schemas.microsoft.com/office/drawing/2014/main" id="{5DEDBEB8-DC1D-1137-F791-C5A7D68A5420}"/>
-              </a:ext>
-            </a:extLst>
-          </p:cNvPr>
-          <p:cNvSpPr/>
-          <p:nvPr/>
-        </p:nvSpPr>
-        <p:spPr>
-          <a:xfrm>
-            <a:off x="2989056" y="82294"/>
-            <a:ext cx="3346430" cy="738664"/>
-          </a:xfrm>
-          <a:prstGeom prst="rect">
-            <a:avLst/>
-          </a:prstGeom>
-          <a:solidFill>
-            <a:srgbClr val="9BBB59"/>
-          </a:solidFill>
-          <a:ln w="25400" cap="rnd">
-            <a:solidFill>
-              <a:srgbClr val="718841"/>
-            </a:solidFill>
-          </a:ln>
-          <a:extLst>
-            <a:ext uri="{C572A759-6A51-4108-AA02-DFA0A04FC94B}">
-              <ma14:wrappingTextBoxFlag xmlns="" xmlns:ma14="http://schemas.microsoft.com/office/mac/drawingml/2011/main" val="1"/>
-            </a:ext>
-          </a:extLst>
-        </p:spPr>
-        <p:txBody>
-          <a:bodyPr wrap="square" lIns="0" tIns="0" rIns="0" bIns="0">
-            <a:spAutoFit/>
-          </a:bodyPr>
-          <a:lstStyle/>
-          <a:p>
-            <a:pPr lvl="0"/>
-            <a:r>
-              <a:rPr lang="en-US" sz="2400" i="1" dirty="0">
-                <a:solidFill>
-                  <a:srgbClr val="FFFFFF"/>
-                </a:solidFill>
-              </a:rPr>
-              <a:t> Attendance password    </a:t>
-            </a:r>
-          </a:p>
-          <a:p>
-            <a:pPr lvl="0"/>
-            <a:r>
-              <a:rPr lang="en-US" sz="2400" i="1" dirty="0">
-                <a:solidFill>
-                  <a:srgbClr val="FFFFFF"/>
-                </a:solidFill>
-              </a:rPr>
-              <a:t> is written on the board</a:t>
-            </a:r>
-          </a:p>
-        </p:txBody>
-      </p:sp>
     </p:spTree>
     <p:extLst>
       <p:ext uri="{BB962C8B-B14F-4D97-AF65-F5344CB8AC3E}">
@@ -4653,251 +4505,6 @@
 </file>
 
 <file path=ppt/slides/slide10.xml><?xml version="1.0" encoding="utf-8"?>
-<p:sld xmlns:a="http://schemas.openxmlformats.org/drawingml/2006/main" xmlns:r="http://schemas.openxmlformats.org/officeDocument/2006/relationships" xmlns:p="http://schemas.openxmlformats.org/presentationml/2006/main">
-  <p:cSld>
-    <p:spTree>
-      <p:nvGrpSpPr>
-        <p:cNvPr id="1" name=""/>
-        <p:cNvGrpSpPr/>
-        <p:nvPr/>
-      </p:nvGrpSpPr>
-      <p:grpSpPr>
-        <a:xfrm>
-          <a:off x="0" y="0"/>
-          <a:ext cx="0" cy="0"/>
-          <a:chOff x="0" y="0"/>
-          <a:chExt cx="0" cy="0"/>
-        </a:xfrm>
-      </p:grpSpPr>
-      <p:sp>
-        <p:nvSpPr>
-          <p:cNvPr id="2" name="Title 1"/>
-          <p:cNvSpPr>
-            <a:spLocks noGrp="1"/>
-          </p:cNvSpPr>
-          <p:nvPr>
-            <p:ph type="title"/>
-          </p:nvPr>
-        </p:nvSpPr>
-        <p:spPr/>
-        <p:txBody>
-          <a:bodyPr/>
-          <a:lstStyle/>
-          <a:p>
-            <a:r>
-              <a:rPr lang="en-US" dirty="0"/>
-              <a:t>Object Constructors</a:t>
-            </a:r>
-          </a:p>
-        </p:txBody>
-      </p:sp>
-      <p:sp>
-        <p:nvSpPr>
-          <p:cNvPr id="3" name="Text Placeholder 2"/>
-          <p:cNvSpPr>
-            <a:spLocks noGrp="1"/>
-          </p:cNvSpPr>
-          <p:nvPr>
-            <p:ph type="body" idx="1"/>
-          </p:nvPr>
-        </p:nvSpPr>
-        <p:spPr>
-          <a:xfrm>
-            <a:off x="106471" y="1449888"/>
-            <a:ext cx="4565737" cy="4525963"/>
-          </a:xfrm>
-        </p:spPr>
-        <p:txBody>
-          <a:bodyPr/>
-          <a:lstStyle/>
-          <a:p>
-            <a:r>
-              <a:rPr lang="en-US" dirty="0"/>
-              <a:t>Open </a:t>
-            </a:r>
-            <a:r>
-              <a:rPr lang="en-US" i="1" dirty="0"/>
-              <a:t>BankAccount.java</a:t>
-            </a:r>
-          </a:p>
-          <a:p>
-            <a:pPr lvl="1"/>
-            <a:r>
-              <a:rPr lang="en-US" dirty="0"/>
-              <a:t>Let’s do the first few, then work on your own</a:t>
-            </a:r>
-          </a:p>
-          <a:p>
-            <a:pPr lvl="1"/>
-            <a:r>
-              <a:rPr lang="en-US" dirty="0"/>
-              <a:t>Have Eclipse help us</a:t>
-            </a:r>
-          </a:p>
-          <a:p>
-            <a:pPr lvl="1"/>
-            <a:r>
-              <a:rPr lang="en-US" dirty="0"/>
-              <a:t>When you’re done and it works, solve the last quiz question</a:t>
-            </a:r>
-          </a:p>
-          <a:p>
-            <a:pPr lvl="1"/>
-            <a:endParaRPr lang="en-US" dirty="0"/>
-          </a:p>
-        </p:txBody>
-      </p:sp>
-      <p:pic>
-        <p:nvPicPr>
-          <p:cNvPr id="6" name="Picture 5">
-            <a:extLst>
-              <a:ext uri="{FF2B5EF4-FFF2-40B4-BE49-F238E27FC236}">
-                <a16:creationId xmlns:a16="http://schemas.microsoft.com/office/drawing/2014/main" id="{901FBCBA-8EC9-66EA-510A-8FEABB1F9E1D}"/>
-              </a:ext>
-            </a:extLst>
-          </p:cNvPr>
-          <p:cNvPicPr>
-            <a:picLocks noChangeAspect="1"/>
-          </p:cNvPicPr>
-          <p:nvPr/>
-        </p:nvPicPr>
-        <p:blipFill>
-          <a:blip r:embed="rId2"/>
-          <a:stretch>
-            <a:fillRect/>
-          </a:stretch>
-        </p:blipFill>
-        <p:spPr>
-          <a:xfrm>
-            <a:off x="4791631" y="1608669"/>
-            <a:ext cx="4245898" cy="2639645"/>
-          </a:xfrm>
-          <a:prstGeom prst="rect">
-            <a:avLst/>
-          </a:prstGeom>
-          <a:ln>
-            <a:solidFill>
-              <a:srgbClr val="00B0F0"/>
-            </a:solidFill>
-          </a:ln>
-        </p:spPr>
-      </p:pic>
-      <mc:AlternateContent xmlns:mc="http://schemas.openxmlformats.org/markup-compatibility/2006" xmlns:p14="http://schemas.microsoft.com/office/powerpoint/2010/main">
-        <mc:Choice Requires="p14">
-          <p:contentPart p14:bwMode="auto" r:id="rId3">
-            <p14:nvContentPartPr>
-              <p14:cNvPr id="7" name="Ink 6">
-                <a:extLst>
-                  <a:ext uri="{FF2B5EF4-FFF2-40B4-BE49-F238E27FC236}">
-                    <a16:creationId xmlns:a16="http://schemas.microsoft.com/office/drawing/2014/main" id="{56C456C2-F428-111B-C116-11F7ADF5F1FD}"/>
-                  </a:ext>
-                </a:extLst>
-              </p14:cNvPr>
-              <p14:cNvContentPartPr/>
-              <p14:nvPr/>
-            </p14:nvContentPartPr>
-            <p14:xfrm>
-              <a:off x="5601429" y="2894794"/>
-              <a:ext cx="1771560" cy="272880"/>
-            </p14:xfrm>
-          </p:contentPart>
-        </mc:Choice>
-        <mc:Fallback xmlns="">
-          <p:pic>
-            <p:nvPicPr>
-              <p:cNvPr id="7" name="Ink 6">
-                <a:extLst>
-                  <a:ext uri="{FF2B5EF4-FFF2-40B4-BE49-F238E27FC236}">
-                    <a16:creationId xmlns:a16="http://schemas.microsoft.com/office/drawing/2014/main" id="{56C456C2-F428-111B-C116-11F7ADF5F1FD}"/>
-                  </a:ext>
-                </a:extLst>
-              </p:cNvPr>
-              <p:cNvPicPr/>
-              <p:nvPr/>
-            </p:nvPicPr>
-            <p:blipFill>
-              <a:blip r:embed="rId4"/>
-              <a:stretch>
-                <a:fillRect/>
-              </a:stretch>
-            </p:blipFill>
-            <p:spPr>
-              <a:xfrm>
-                <a:off x="5583429" y="2876794"/>
-                <a:ext cx="1807200" cy="308520"/>
-              </a:xfrm>
-              <a:prstGeom prst="rect">
-                <a:avLst/>
-              </a:prstGeom>
-            </p:spPr>
-          </p:pic>
-        </mc:Fallback>
-      </mc:AlternateContent>
-      <mc:AlternateContent xmlns:mc="http://schemas.openxmlformats.org/markup-compatibility/2006" xmlns:p14="http://schemas.microsoft.com/office/powerpoint/2010/main">
-        <mc:Choice Requires="p14">
-          <p:contentPart p14:bwMode="auto" r:id="rId5">
-            <p14:nvContentPartPr>
-              <p14:cNvPr id="8" name="Ink 7">
-                <a:extLst>
-                  <a:ext uri="{FF2B5EF4-FFF2-40B4-BE49-F238E27FC236}">
-                    <a16:creationId xmlns:a16="http://schemas.microsoft.com/office/drawing/2014/main" id="{21EF0E87-17A4-2C2E-EC5E-911F282720AA}"/>
-                  </a:ext>
-                </a:extLst>
-              </p14:cNvPr>
-              <p14:cNvContentPartPr/>
-              <p14:nvPr/>
-            </p14:nvContentPartPr>
-            <p14:xfrm>
-              <a:off x="5475429" y="3438034"/>
-              <a:ext cx="2233800" cy="307440"/>
-            </p14:xfrm>
-          </p:contentPart>
-        </mc:Choice>
-        <mc:Fallback xmlns="">
-          <p:pic>
-            <p:nvPicPr>
-              <p:cNvPr id="8" name="Ink 7">
-                <a:extLst>
-                  <a:ext uri="{FF2B5EF4-FFF2-40B4-BE49-F238E27FC236}">
-                    <a16:creationId xmlns:a16="http://schemas.microsoft.com/office/drawing/2014/main" id="{21EF0E87-17A4-2C2E-EC5E-911F282720AA}"/>
-                  </a:ext>
-                </a:extLst>
-              </p:cNvPr>
-              <p:cNvPicPr/>
-              <p:nvPr/>
-            </p:nvPicPr>
-            <p:blipFill>
-              <a:blip r:embed="rId6"/>
-              <a:stretch>
-                <a:fillRect/>
-              </a:stretch>
-            </p:blipFill>
-            <p:spPr>
-              <a:xfrm>
-                <a:off x="5457429" y="3420394"/>
-                <a:ext cx="2269440" cy="343080"/>
-              </a:xfrm>
-              <a:prstGeom prst="rect">
-                <a:avLst/>
-              </a:prstGeom>
-            </p:spPr>
-          </p:pic>
-        </mc:Fallback>
-      </mc:AlternateContent>
-    </p:spTree>
-    <p:extLst>
-      <p:ext uri="{BB962C8B-B14F-4D97-AF65-F5344CB8AC3E}">
-        <p14:creationId xmlns:p14="http://schemas.microsoft.com/office/powerpoint/2010/main" val="3093067597"/>
-      </p:ext>
-    </p:extLst>
-  </p:cSld>
-  <p:clrMapOvr>
-    <a:masterClrMapping/>
-  </p:clrMapOvr>
-</p:sld>
-</file>
-
-<file path=ppt/slides/slide11.xml><?xml version="1.0" encoding="utf-8"?>
 <p:sld xmlns:a="http://schemas.openxmlformats.org/drawingml/2006/main" xmlns:r="http://schemas.openxmlformats.org/officeDocument/2006/relationships" xmlns:p="http://schemas.openxmlformats.org/presentationml/2006/main">
   <p:cSld>
     <p:spTree>
@@ -5031,7 +4638,7 @@
 </p:sld>
 </file>
 
-<file path=ppt/slides/slide12.xml><?xml version="1.0" encoding="utf-8"?>
+<file path=ppt/slides/slide11.xml><?xml version="1.0" encoding="utf-8"?>
 <p:sld xmlns:a="http://schemas.openxmlformats.org/drawingml/2006/main" xmlns:r="http://schemas.openxmlformats.org/officeDocument/2006/relationships" xmlns:p="http://schemas.openxmlformats.org/presentationml/2006/main">
   <p:cSld>
     <p:spTree>
@@ -5281,18 +4888,36 @@
       </p:grpSpPr>
       <p:sp>
         <p:nvSpPr>
-          <p:cNvPr id="2" name="Title 1">
-            <a:extLst>
-              <a:ext uri="{FF2B5EF4-FFF2-40B4-BE49-F238E27FC236}">
-                <a16:creationId xmlns:a16="http://schemas.microsoft.com/office/drawing/2014/main" id="{BFC0A522-914E-CA03-07C3-87B4878FF413}"/>
-              </a:ext>
-            </a:extLst>
-          </p:cNvPr>
+          <p:cNvPr id="2" name="Title 1"/>
           <p:cNvSpPr>
             <a:spLocks noGrp="1"/>
           </p:cNvSpPr>
           <p:nvPr>
             <p:ph type="title"/>
+          </p:nvPr>
+        </p:nvSpPr>
+        <p:spPr/>
+        <p:txBody>
+          <a:bodyPr>
+            <a:normAutofit/>
+          </a:bodyPr>
+          <a:lstStyle/>
+          <a:p>
+            <a:r>
+              <a:rPr lang="en-US" dirty="0"/>
+              <a:t>Class – What, When, Why, &amp; How?</a:t>
+            </a:r>
+          </a:p>
+        </p:txBody>
+      </p:sp>
+      <p:sp>
+        <p:nvSpPr>
+          <p:cNvPr id="3" name="Content Placeholder 2"/>
+          <p:cNvSpPr>
+            <a:spLocks noGrp="1"/>
+          </p:cNvSpPr>
+          <p:nvPr>
+            <p:ph idx="1"/>
           </p:nvPr>
         </p:nvSpPr>
         <p:spPr/>
@@ -5300,56 +4925,44 @@
           <a:bodyPr/>
           <a:lstStyle/>
           <a:p>
-            <a:r>
-              <a:rPr lang="en-US"/>
-              <a:t>Using the Debugger</a:t>
+            <a:pPr marL="0" indent="0">
+              <a:buNone/>
+            </a:pPr>
+            <a:r>
+              <a:rPr lang="en-US" dirty="0"/>
+              <a:t>What:</a:t>
+            </a:r>
+          </a:p>
+          <a:p>
+            <a:r>
+              <a:rPr lang="en-US" dirty="0"/>
+              <a:t>A blueprint for a custom </a:t>
+            </a:r>
+            <a:r>
+              <a:rPr lang="en-US" b="1" dirty="0"/>
+              <a:t>type</a:t>
             </a:r>
             <a:endParaRPr lang="en-US" dirty="0"/>
           </a:p>
-        </p:txBody>
-      </p:sp>
-      <p:sp>
-        <p:nvSpPr>
-          <p:cNvPr id="3" name="Content Placeholder 2">
-            <a:extLst>
-              <a:ext uri="{FF2B5EF4-FFF2-40B4-BE49-F238E27FC236}">
-                <a16:creationId xmlns:a16="http://schemas.microsoft.com/office/drawing/2014/main" id="{3B693506-BBFE-EC3E-DF50-293DC1C56401}"/>
-              </a:ext>
-            </a:extLst>
-          </p:cNvPr>
-          <p:cNvSpPr>
-            <a:spLocks noGrp="1"/>
-          </p:cNvSpPr>
-          <p:nvPr>
-            <p:ph idx="1"/>
-          </p:nvPr>
-        </p:nvSpPr>
-        <p:spPr/>
-        <p:txBody>
-          <a:bodyPr/>
-          <a:lstStyle/>
-          <a:p>
+          <a:p>
+            <a:pPr marL="0" indent="0">
+              <a:buNone/>
+            </a:pPr>
             <a:r>
               <a:rPr lang="en-US" dirty="0"/>
-              <a:t>How is it going?</a:t>
+              <a:t>When:</a:t>
             </a:r>
           </a:p>
           <a:p>
             <a:r>
               <a:rPr lang="en-US" dirty="0"/>
-              <a:t>Have you used it?</a:t>
+              <a:t>Define a class when you’re representing a concept (think nouns)</a:t>
             </a:r>
           </a:p>
           <a:p>
             <a:r>
               <a:rPr lang="en-US" dirty="0"/>
-              <a:t>Shall we practice it again?</a:t>
-            </a:r>
-          </a:p>
-          <a:p>
-            <a:r>
-              <a:rPr lang="en-US" dirty="0"/>
-              <a:t>Questions?</a:t>
+              <a:t>When no other existing type can do what you want/need</a:t>
             </a:r>
           </a:p>
         </p:txBody>
@@ -5357,7 +4970,7 @@
     </p:spTree>
     <p:extLst>
       <p:ext uri="{BB962C8B-B14F-4D97-AF65-F5344CB8AC3E}">
-        <p14:creationId xmlns:p14="http://schemas.microsoft.com/office/powerpoint/2010/main" val="3174754108"/>
+        <p14:creationId xmlns:p14="http://schemas.microsoft.com/office/powerpoint/2010/main" val="2434022835"/>
       </p:ext>
     </p:extLst>
   </p:cSld>
@@ -5396,117 +5009,6 @@
         </p:nvSpPr>
         <p:spPr/>
         <p:txBody>
-          <a:bodyPr>
-            <a:normAutofit/>
-          </a:bodyPr>
-          <a:lstStyle/>
-          <a:p>
-            <a:r>
-              <a:rPr lang="en-US" dirty="0"/>
-              <a:t>Class – What, When, Why, &amp; How?</a:t>
-            </a:r>
-          </a:p>
-        </p:txBody>
-      </p:sp>
-      <p:sp>
-        <p:nvSpPr>
-          <p:cNvPr id="3" name="Content Placeholder 2"/>
-          <p:cNvSpPr>
-            <a:spLocks noGrp="1"/>
-          </p:cNvSpPr>
-          <p:nvPr>
-            <p:ph idx="1"/>
-          </p:nvPr>
-        </p:nvSpPr>
-        <p:spPr/>
-        <p:txBody>
-          <a:bodyPr/>
-          <a:lstStyle/>
-          <a:p>
-            <a:pPr marL="0" indent="0">
-              <a:buNone/>
-            </a:pPr>
-            <a:r>
-              <a:rPr lang="en-US" dirty="0"/>
-              <a:t>What:</a:t>
-            </a:r>
-          </a:p>
-          <a:p>
-            <a:r>
-              <a:rPr lang="en-US" dirty="0"/>
-              <a:t>A blueprint for a custom </a:t>
-            </a:r>
-            <a:r>
-              <a:rPr lang="en-US" b="1" dirty="0"/>
-              <a:t>type</a:t>
-            </a:r>
-            <a:endParaRPr lang="en-US" dirty="0"/>
-          </a:p>
-          <a:p>
-            <a:pPr marL="0" indent="0">
-              <a:buNone/>
-            </a:pPr>
-            <a:r>
-              <a:rPr lang="en-US" dirty="0"/>
-              <a:t>When:</a:t>
-            </a:r>
-          </a:p>
-          <a:p>
-            <a:r>
-              <a:rPr lang="en-US" dirty="0"/>
-              <a:t>Define a class when you’re representing a concept (think nouns)</a:t>
-            </a:r>
-          </a:p>
-          <a:p>
-            <a:r>
-              <a:rPr lang="en-US" dirty="0"/>
-              <a:t>When no other existing type can do what you want/need</a:t>
-            </a:r>
-          </a:p>
-        </p:txBody>
-      </p:sp>
-    </p:spTree>
-    <p:extLst>
-      <p:ext uri="{BB962C8B-B14F-4D97-AF65-F5344CB8AC3E}">
-        <p14:creationId xmlns:p14="http://schemas.microsoft.com/office/powerpoint/2010/main" val="2434022835"/>
-      </p:ext>
-    </p:extLst>
-  </p:cSld>
-  <p:clrMapOvr>
-    <a:masterClrMapping/>
-  </p:clrMapOvr>
-</p:sld>
-</file>
-
-<file path=ppt/slides/slide4.xml><?xml version="1.0" encoding="utf-8"?>
-<p:sld xmlns:a="http://schemas.openxmlformats.org/drawingml/2006/main" xmlns:r="http://schemas.openxmlformats.org/officeDocument/2006/relationships" xmlns:p="http://schemas.openxmlformats.org/presentationml/2006/main">
-  <p:cSld>
-    <p:spTree>
-      <p:nvGrpSpPr>
-        <p:cNvPr id="1" name=""/>
-        <p:cNvGrpSpPr/>
-        <p:nvPr/>
-      </p:nvGrpSpPr>
-      <p:grpSpPr>
-        <a:xfrm>
-          <a:off x="0" y="0"/>
-          <a:ext cx="0" cy="0"/>
-          <a:chOff x="0" y="0"/>
-          <a:chExt cx="0" cy="0"/>
-        </a:xfrm>
-      </p:grpSpPr>
-      <p:sp>
-        <p:nvSpPr>
-          <p:cNvPr id="2" name="Title 1"/>
-          <p:cNvSpPr>
-            <a:spLocks noGrp="1"/>
-          </p:cNvSpPr>
-          <p:nvPr>
-            <p:ph type="title"/>
-          </p:nvPr>
-        </p:nvSpPr>
-        <p:spPr/>
-        <p:txBody>
           <a:bodyPr/>
           <a:lstStyle/>
           <a:p>
@@ -5668,7 +5170,7 @@
 </p:sld>
 </file>
 
-<file path=ppt/slides/slide5.xml><?xml version="1.0" encoding="utf-8"?>
+<file path=ppt/slides/slide4.xml><?xml version="1.0" encoding="utf-8"?>
 <p:sld xmlns:a="http://schemas.openxmlformats.org/drawingml/2006/main" xmlns:r="http://schemas.openxmlformats.org/officeDocument/2006/relationships" xmlns:p="http://schemas.openxmlformats.org/presentationml/2006/main">
   <p:cSld>
     <p:spTree>
@@ -6329,6 +5831,134 @@
 </p:sld>
 </file>
 
+<file path=ppt/slides/slide5.xml><?xml version="1.0" encoding="utf-8"?>
+<p:sld xmlns:a="http://schemas.openxmlformats.org/drawingml/2006/main" xmlns:r="http://schemas.openxmlformats.org/officeDocument/2006/relationships" xmlns:p="http://schemas.openxmlformats.org/presentationml/2006/main">
+  <p:cSld>
+    <p:spTree>
+      <p:nvGrpSpPr>
+        <p:cNvPr id="1" name=""/>
+        <p:cNvGrpSpPr/>
+        <p:nvPr/>
+      </p:nvGrpSpPr>
+      <p:grpSpPr>
+        <a:xfrm>
+          <a:off x="0" y="0"/>
+          <a:ext cx="0" cy="0"/>
+          <a:chOff x="0" y="0"/>
+          <a:chExt cx="0" cy="0"/>
+        </a:xfrm>
+      </p:grpSpPr>
+      <p:sp>
+        <p:nvSpPr>
+          <p:cNvPr id="2" name="Title 1"/>
+          <p:cNvSpPr>
+            <a:spLocks noGrp="1"/>
+          </p:cNvSpPr>
+          <p:nvPr>
+            <p:ph type="title"/>
+          </p:nvPr>
+        </p:nvSpPr>
+        <p:spPr/>
+        <p:txBody>
+          <a:bodyPr>
+            <a:normAutofit/>
+          </a:bodyPr>
+          <a:lstStyle/>
+          <a:p>
+            <a:r>
+              <a:rPr lang="en-US" sz="3600" dirty="0"/>
+              <a:t>Constructors – What, When, Why, How?</a:t>
+            </a:r>
+          </a:p>
+        </p:txBody>
+      </p:sp>
+      <p:sp>
+        <p:nvSpPr>
+          <p:cNvPr id="3" name="Content Placeholder 2"/>
+          <p:cNvSpPr>
+            <a:spLocks noGrp="1"/>
+          </p:cNvSpPr>
+          <p:nvPr>
+            <p:ph idx="1"/>
+          </p:nvPr>
+        </p:nvSpPr>
+        <p:spPr/>
+        <p:txBody>
+          <a:bodyPr>
+            <a:normAutofit fontScale="85000" lnSpcReduction="20000"/>
+          </a:bodyPr>
+          <a:lstStyle/>
+          <a:p>
+            <a:pPr marL="0" indent="0">
+              <a:buNone/>
+            </a:pPr>
+            <a:r>
+              <a:rPr lang="en-US" dirty="0"/>
+              <a:t>What:</a:t>
+            </a:r>
+          </a:p>
+          <a:p>
+            <a:r>
+              <a:rPr lang="en-US" dirty="0"/>
+              <a:t>Special method called when a new object instance of a class is created</a:t>
+            </a:r>
+          </a:p>
+          <a:p>
+            <a:r>
+              <a:rPr lang="en-US" dirty="0"/>
+              <a:t>Initializes the new object instance</a:t>
+            </a:r>
+          </a:p>
+          <a:p>
+            <a:r>
+              <a:rPr lang="en-US" dirty="0"/>
+              <a:t>Like the __</a:t>
+            </a:r>
+            <a:r>
+              <a:rPr lang="en-US" dirty="0" err="1"/>
+              <a:t>init</a:t>
+            </a:r>
+            <a:r>
+              <a:rPr lang="en-US" dirty="0"/>
+              <a:t>__ method in Python</a:t>
+            </a:r>
+          </a:p>
+          <a:p>
+            <a:pPr marL="0" indent="0">
+              <a:buNone/>
+            </a:pPr>
+            <a:r>
+              <a:rPr lang="en-US" dirty="0"/>
+              <a:t>When:</a:t>
+            </a:r>
+          </a:p>
+          <a:p>
+            <a:r>
+              <a:rPr lang="en-US" dirty="0"/>
+              <a:t>Define a constructor when special initialization of a class's fields is required</a:t>
+            </a:r>
+          </a:p>
+          <a:p>
+            <a:r>
+              <a:rPr lang="en-US" dirty="0"/>
+              <a:t>Otherwise, Java implicitly creates a no-argument constructor if you don’t add one, but it does not do anything</a:t>
+            </a:r>
+          </a:p>
+        </p:txBody>
+      </p:sp>
+    </p:spTree>
+    <p:extLst>
+      <p:ext uri="{BB962C8B-B14F-4D97-AF65-F5344CB8AC3E}">
+        <p14:creationId xmlns:p14="http://schemas.microsoft.com/office/powerpoint/2010/main" val="4164257097"/>
+      </p:ext>
+    </p:extLst>
+  </p:cSld>
+  <p:clrMapOvr>
+    <a:masterClrMapping/>
+  </p:clrMapOvr>
+</p:sld>
+</file>
+
 <file path=ppt/slides/slide6.xml><?xml version="1.0" encoding="utf-8"?>
 <p:sld xmlns:a="http://schemas.openxmlformats.org/drawingml/2006/main" xmlns:r="http://schemas.openxmlformats.org/officeDocument/2006/relationships" xmlns:p="http://schemas.openxmlformats.org/presentationml/2006/main">
   <p:cSld>
@@ -6359,134 +5989,6 @@
         <p:spPr/>
         <p:txBody>
           <a:bodyPr>
-            <a:normAutofit/>
-          </a:bodyPr>
-          <a:lstStyle/>
-          <a:p>
-            <a:r>
-              <a:rPr lang="en-US" sz="3600" dirty="0"/>
-              <a:t>Constructors – What, When, Why, How?</a:t>
-            </a:r>
-          </a:p>
-        </p:txBody>
-      </p:sp>
-      <p:sp>
-        <p:nvSpPr>
-          <p:cNvPr id="3" name="Content Placeholder 2"/>
-          <p:cNvSpPr>
-            <a:spLocks noGrp="1"/>
-          </p:cNvSpPr>
-          <p:nvPr>
-            <p:ph idx="1"/>
-          </p:nvPr>
-        </p:nvSpPr>
-        <p:spPr/>
-        <p:txBody>
-          <a:bodyPr>
-            <a:normAutofit fontScale="85000" lnSpcReduction="20000"/>
-          </a:bodyPr>
-          <a:lstStyle/>
-          <a:p>
-            <a:pPr marL="0" indent="0">
-              <a:buNone/>
-            </a:pPr>
-            <a:r>
-              <a:rPr lang="en-US" dirty="0"/>
-              <a:t>What:</a:t>
-            </a:r>
-          </a:p>
-          <a:p>
-            <a:r>
-              <a:rPr lang="en-US" dirty="0"/>
-              <a:t>Special method called when a new object instance of a class is created</a:t>
-            </a:r>
-          </a:p>
-          <a:p>
-            <a:r>
-              <a:rPr lang="en-US" dirty="0"/>
-              <a:t>Initializes the new object instance</a:t>
-            </a:r>
-          </a:p>
-          <a:p>
-            <a:r>
-              <a:rPr lang="en-US" dirty="0"/>
-              <a:t>Like the __</a:t>
-            </a:r>
-            <a:r>
-              <a:rPr lang="en-US" dirty="0" err="1"/>
-              <a:t>init</a:t>
-            </a:r>
-            <a:r>
-              <a:rPr lang="en-US" dirty="0"/>
-              <a:t>__ method in Python</a:t>
-            </a:r>
-          </a:p>
-          <a:p>
-            <a:pPr marL="0" indent="0">
-              <a:buNone/>
-            </a:pPr>
-            <a:r>
-              <a:rPr lang="en-US" dirty="0"/>
-              <a:t>When:</a:t>
-            </a:r>
-          </a:p>
-          <a:p>
-            <a:r>
-              <a:rPr lang="en-US" dirty="0"/>
-              <a:t>Define a constructor when special initialization of a class's fields is required</a:t>
-            </a:r>
-          </a:p>
-          <a:p>
-            <a:r>
-              <a:rPr lang="en-US" dirty="0"/>
-              <a:t>Otherwise, Java implicitly creates a no-argument constructor if you don’t add one, but it does not do anything</a:t>
-            </a:r>
-          </a:p>
-        </p:txBody>
-      </p:sp>
-    </p:spTree>
-    <p:extLst>
-      <p:ext uri="{BB962C8B-B14F-4D97-AF65-F5344CB8AC3E}">
-        <p14:creationId xmlns:p14="http://schemas.microsoft.com/office/powerpoint/2010/main" val="4164257097"/>
-      </p:ext>
-    </p:extLst>
-  </p:cSld>
-  <p:clrMapOvr>
-    <a:masterClrMapping/>
-  </p:clrMapOvr>
-</p:sld>
-</file>
-
-<file path=ppt/slides/slide7.xml><?xml version="1.0" encoding="utf-8"?>
-<p:sld xmlns:a="http://schemas.openxmlformats.org/drawingml/2006/main" xmlns:r="http://schemas.openxmlformats.org/officeDocument/2006/relationships" xmlns:p="http://schemas.openxmlformats.org/presentationml/2006/main">
-  <p:cSld>
-    <p:spTree>
-      <p:nvGrpSpPr>
-        <p:cNvPr id="1" name=""/>
-        <p:cNvGrpSpPr/>
-        <p:nvPr/>
-      </p:nvGrpSpPr>
-      <p:grpSpPr>
-        <a:xfrm>
-          <a:off x="0" y="0"/>
-          <a:ext cx="0" cy="0"/>
-          <a:chOff x="0" y="0"/>
-          <a:chExt cx="0" cy="0"/>
-        </a:xfrm>
-      </p:grpSpPr>
-      <p:sp>
-        <p:nvSpPr>
-          <p:cNvPr id="2" name="Title 1"/>
-          <p:cNvSpPr>
-            <a:spLocks noGrp="1"/>
-          </p:cNvSpPr>
-          <p:nvPr>
-            <p:ph type="title"/>
-          </p:nvPr>
-        </p:nvSpPr>
-        <p:spPr/>
-        <p:txBody>
-          <a:bodyPr>
             <a:noAutofit/>
           </a:bodyPr>
           <a:lstStyle/>
@@ -6839,7 +6341,7 @@
 </p:sld>
 </file>
 
-<file path=ppt/slides/slide8.xml><?xml version="1.0" encoding="utf-8"?>
+<file path=ppt/slides/slide7.xml><?xml version="1.0" encoding="utf-8"?>
 <p:sld xmlns:a="http://schemas.openxmlformats.org/drawingml/2006/main" xmlns:r="http://schemas.openxmlformats.org/officeDocument/2006/relationships" xmlns:p="http://schemas.openxmlformats.org/presentationml/2006/main">
   <p:cSld>
     <p:spTree>
@@ -7006,7 +6508,7 @@
 </p:sld>
 </file>
 
-<file path=ppt/slides/slide9.xml><?xml version="1.0" encoding="utf-8"?>
+<file path=ppt/slides/slide8.xml><?xml version="1.0" encoding="utf-8"?>
 <p:sld xmlns:a="http://schemas.openxmlformats.org/drawingml/2006/main" xmlns:r="http://schemas.openxmlformats.org/officeDocument/2006/relationships" xmlns:p="http://schemas.openxmlformats.org/presentationml/2006/main">
   <p:cSld>
     <p:spTree>
@@ -7042,7 +6544,7 @@
           </a:ln>
           <a:extLst>
             <a:ext uri="{C572A759-6A51-4108-AA02-DFA0A04FC94B}">
-              <ma14:wrappingTextBoxFlag xmlns="" xmlns:ma14="http://schemas.microsoft.com/office/mac/drawingml/2011/main" val="1"/>
+              <ma14:wrappingTextBoxFlag xmlns:ma14="http://schemas.microsoft.com/office/mac/drawingml/2011/main" xmlns="" val="1"/>
             </a:ext>
           </a:extLst>
         </p:spPr>
@@ -7264,7 +6766,7 @@
               <a:effectLst/>
               <a:extLst>
                 <a:ext uri="{C572A759-6A51-4108-AA02-DFA0A04FC94B}">
-                  <ma14:wrappingTextBoxFlag xmlns="" xmlns:ma14="http://schemas.microsoft.com/office/mac/drawingml/2011/main" val="1"/>
+                  <ma14:wrappingTextBoxFlag xmlns:ma14="http://schemas.microsoft.com/office/mac/drawingml/2011/main" xmlns="" val="1"/>
                 </a:ext>
               </a:extLst>
             </p:spPr>
@@ -7443,7 +6945,7 @@
               <a:effectLst/>
               <a:extLst>
                 <a:ext uri="{C572A759-6A51-4108-AA02-DFA0A04FC94B}">
-                  <ma14:wrappingTextBoxFlag xmlns="" xmlns:ma14="http://schemas.microsoft.com/office/mac/drawingml/2011/main" val="1"/>
+                  <ma14:wrappingTextBoxFlag xmlns:ma14="http://schemas.microsoft.com/office/mac/drawingml/2011/main" xmlns="" val="1"/>
                 </a:ext>
               </a:extLst>
             </p:spPr>
@@ -7613,7 +7115,7 @@
               <a:effectLst/>
               <a:extLst>
                 <a:ext uri="{C572A759-6A51-4108-AA02-DFA0A04FC94B}">
-                  <ma14:wrappingTextBoxFlag xmlns="" xmlns:ma14="http://schemas.microsoft.com/office/mac/drawingml/2011/main" val="1"/>
+                  <ma14:wrappingTextBoxFlag xmlns:ma14="http://schemas.microsoft.com/office/mac/drawingml/2011/main" xmlns="" val="1"/>
                 </a:ext>
               </a:extLst>
             </p:spPr>
@@ -7801,7 +7303,7 @@
               <a:effectLst/>
               <a:extLst>
                 <a:ext uri="{C572A759-6A51-4108-AA02-DFA0A04FC94B}">
-                  <ma14:wrappingTextBoxFlag xmlns="" xmlns:ma14="http://schemas.microsoft.com/office/mac/drawingml/2011/main" val="1"/>
+                  <ma14:wrappingTextBoxFlag xmlns:ma14="http://schemas.microsoft.com/office/mac/drawingml/2011/main" xmlns="" val="1"/>
                 </a:ext>
               </a:extLst>
             </p:spPr>
@@ -7946,7 +7448,7 @@
             <a:effectLst/>
             <a:extLst>
               <a:ext uri="{C572A759-6A51-4108-AA02-DFA0A04FC94B}">
-                <ma14:wrappingTextBoxFlag xmlns="" xmlns:ma14="http://schemas.microsoft.com/office/mac/drawingml/2011/main" val="1"/>
+                <ma14:wrappingTextBoxFlag xmlns:ma14="http://schemas.microsoft.com/office/mac/drawingml/2011/main" xmlns="" val="1"/>
               </a:ext>
             </a:extLst>
           </p:spPr>
@@ -8008,6 +7510,251 @@
     <p:extLst>
       <p:ext uri="{BB962C8B-B14F-4D97-AF65-F5344CB8AC3E}">
         <p14:creationId xmlns:p14="http://schemas.microsoft.com/office/powerpoint/2010/main" val="3151746698"/>
+      </p:ext>
+    </p:extLst>
+  </p:cSld>
+  <p:clrMapOvr>
+    <a:masterClrMapping/>
+  </p:clrMapOvr>
+</p:sld>
+</file>
+
+<file path=ppt/slides/slide9.xml><?xml version="1.0" encoding="utf-8"?>
+<p:sld xmlns:a="http://schemas.openxmlformats.org/drawingml/2006/main" xmlns:r="http://schemas.openxmlformats.org/officeDocument/2006/relationships" xmlns:p="http://schemas.openxmlformats.org/presentationml/2006/main">
+  <p:cSld>
+    <p:spTree>
+      <p:nvGrpSpPr>
+        <p:cNvPr id="1" name=""/>
+        <p:cNvGrpSpPr/>
+        <p:nvPr/>
+      </p:nvGrpSpPr>
+      <p:grpSpPr>
+        <a:xfrm>
+          <a:off x="0" y="0"/>
+          <a:ext cx="0" cy="0"/>
+          <a:chOff x="0" y="0"/>
+          <a:chExt cx="0" cy="0"/>
+        </a:xfrm>
+      </p:grpSpPr>
+      <p:sp>
+        <p:nvSpPr>
+          <p:cNvPr id="2" name="Title 1"/>
+          <p:cNvSpPr>
+            <a:spLocks noGrp="1"/>
+          </p:cNvSpPr>
+          <p:nvPr>
+            <p:ph type="title"/>
+          </p:nvPr>
+        </p:nvSpPr>
+        <p:spPr/>
+        <p:txBody>
+          <a:bodyPr/>
+          <a:lstStyle/>
+          <a:p>
+            <a:r>
+              <a:rPr lang="en-US" dirty="0"/>
+              <a:t>Object Constructors</a:t>
+            </a:r>
+          </a:p>
+        </p:txBody>
+      </p:sp>
+      <p:sp>
+        <p:nvSpPr>
+          <p:cNvPr id="3" name="Text Placeholder 2"/>
+          <p:cNvSpPr>
+            <a:spLocks noGrp="1"/>
+          </p:cNvSpPr>
+          <p:nvPr>
+            <p:ph type="body" idx="1"/>
+          </p:nvPr>
+        </p:nvSpPr>
+        <p:spPr>
+          <a:xfrm>
+            <a:off x="106471" y="1449888"/>
+            <a:ext cx="4565737" cy="4525963"/>
+          </a:xfrm>
+        </p:spPr>
+        <p:txBody>
+          <a:bodyPr/>
+          <a:lstStyle/>
+          <a:p>
+            <a:r>
+              <a:rPr lang="en-US" dirty="0"/>
+              <a:t>Open </a:t>
+            </a:r>
+            <a:r>
+              <a:rPr lang="en-US" i="1" dirty="0"/>
+              <a:t>BankAccount.java</a:t>
+            </a:r>
+          </a:p>
+          <a:p>
+            <a:pPr lvl="1"/>
+            <a:r>
+              <a:rPr lang="en-US" dirty="0"/>
+              <a:t>Let’s do the first few, then work on your own</a:t>
+            </a:r>
+          </a:p>
+          <a:p>
+            <a:pPr lvl="1"/>
+            <a:r>
+              <a:rPr lang="en-US" dirty="0"/>
+              <a:t>Have Eclipse help us</a:t>
+            </a:r>
+          </a:p>
+          <a:p>
+            <a:pPr lvl="1"/>
+            <a:r>
+              <a:rPr lang="en-US" dirty="0"/>
+              <a:t>When you’re done and it works, solve the last quiz question</a:t>
+            </a:r>
+          </a:p>
+          <a:p>
+            <a:pPr lvl="1"/>
+            <a:endParaRPr lang="en-US" dirty="0"/>
+          </a:p>
+        </p:txBody>
+      </p:sp>
+      <p:pic>
+        <p:nvPicPr>
+          <p:cNvPr id="6" name="Picture 5">
+            <a:extLst>
+              <a:ext uri="{FF2B5EF4-FFF2-40B4-BE49-F238E27FC236}">
+                <a16:creationId xmlns:a16="http://schemas.microsoft.com/office/drawing/2014/main" id="{901FBCBA-8EC9-66EA-510A-8FEABB1F9E1D}"/>
+              </a:ext>
+            </a:extLst>
+          </p:cNvPr>
+          <p:cNvPicPr>
+            <a:picLocks noChangeAspect="1"/>
+          </p:cNvPicPr>
+          <p:nvPr/>
+        </p:nvPicPr>
+        <p:blipFill>
+          <a:blip r:embed="rId2"/>
+          <a:stretch>
+            <a:fillRect/>
+          </a:stretch>
+        </p:blipFill>
+        <p:spPr>
+          <a:xfrm>
+            <a:off x="4791631" y="1608669"/>
+            <a:ext cx="4245898" cy="2639645"/>
+          </a:xfrm>
+          <a:prstGeom prst="rect">
+            <a:avLst/>
+          </a:prstGeom>
+          <a:ln>
+            <a:solidFill>
+              <a:srgbClr val="00B0F0"/>
+            </a:solidFill>
+          </a:ln>
+        </p:spPr>
+      </p:pic>
+      <mc:AlternateContent xmlns:mc="http://schemas.openxmlformats.org/markup-compatibility/2006" xmlns:p14="http://schemas.microsoft.com/office/powerpoint/2010/main">
+        <mc:Choice Requires="p14">
+          <p:contentPart p14:bwMode="auto" r:id="rId3">
+            <p14:nvContentPartPr>
+              <p14:cNvPr id="7" name="Ink 6">
+                <a:extLst>
+                  <a:ext uri="{FF2B5EF4-FFF2-40B4-BE49-F238E27FC236}">
+                    <a16:creationId xmlns:a16="http://schemas.microsoft.com/office/drawing/2014/main" id="{56C456C2-F428-111B-C116-11F7ADF5F1FD}"/>
+                  </a:ext>
+                </a:extLst>
+              </p14:cNvPr>
+              <p14:cNvContentPartPr/>
+              <p14:nvPr/>
+            </p14:nvContentPartPr>
+            <p14:xfrm>
+              <a:off x="5601429" y="2894794"/>
+              <a:ext cx="1771560" cy="272880"/>
+            </p14:xfrm>
+          </p:contentPart>
+        </mc:Choice>
+        <mc:Fallback xmlns="">
+          <p:pic>
+            <p:nvPicPr>
+              <p:cNvPr id="7" name="Ink 6">
+                <a:extLst>
+                  <a:ext uri="{FF2B5EF4-FFF2-40B4-BE49-F238E27FC236}">
+                    <a16:creationId xmlns:a16="http://schemas.microsoft.com/office/drawing/2014/main" id="{56C456C2-F428-111B-C116-11F7ADF5F1FD}"/>
+                  </a:ext>
+                </a:extLst>
+              </p:cNvPr>
+              <p:cNvPicPr/>
+              <p:nvPr/>
+            </p:nvPicPr>
+            <p:blipFill>
+              <a:blip r:embed="rId4"/>
+              <a:stretch>
+                <a:fillRect/>
+              </a:stretch>
+            </p:blipFill>
+            <p:spPr>
+              <a:xfrm>
+                <a:off x="5583429" y="2876794"/>
+                <a:ext cx="1807200" cy="308520"/>
+              </a:xfrm>
+              <a:prstGeom prst="rect">
+                <a:avLst/>
+              </a:prstGeom>
+            </p:spPr>
+          </p:pic>
+        </mc:Fallback>
+      </mc:AlternateContent>
+      <mc:AlternateContent xmlns:mc="http://schemas.openxmlformats.org/markup-compatibility/2006" xmlns:p14="http://schemas.microsoft.com/office/powerpoint/2010/main">
+        <mc:Choice Requires="p14">
+          <p:contentPart p14:bwMode="auto" r:id="rId5">
+            <p14:nvContentPartPr>
+              <p14:cNvPr id="8" name="Ink 7">
+                <a:extLst>
+                  <a:ext uri="{FF2B5EF4-FFF2-40B4-BE49-F238E27FC236}">
+                    <a16:creationId xmlns:a16="http://schemas.microsoft.com/office/drawing/2014/main" id="{21EF0E87-17A4-2C2E-EC5E-911F282720AA}"/>
+                  </a:ext>
+                </a:extLst>
+              </p14:cNvPr>
+              <p14:cNvContentPartPr/>
+              <p14:nvPr/>
+            </p14:nvContentPartPr>
+            <p14:xfrm>
+              <a:off x="5475429" y="3438034"/>
+              <a:ext cx="2233800" cy="307440"/>
+            </p14:xfrm>
+          </p:contentPart>
+        </mc:Choice>
+        <mc:Fallback xmlns="">
+          <p:pic>
+            <p:nvPicPr>
+              <p:cNvPr id="8" name="Ink 7">
+                <a:extLst>
+                  <a:ext uri="{FF2B5EF4-FFF2-40B4-BE49-F238E27FC236}">
+                    <a16:creationId xmlns:a16="http://schemas.microsoft.com/office/drawing/2014/main" id="{21EF0E87-17A4-2C2E-EC5E-911F282720AA}"/>
+                  </a:ext>
+                </a:extLst>
+              </p:cNvPr>
+              <p:cNvPicPr/>
+              <p:nvPr/>
+            </p:nvPicPr>
+            <p:blipFill>
+              <a:blip r:embed="rId6"/>
+              <a:stretch>
+                <a:fillRect/>
+              </a:stretch>
+            </p:blipFill>
+            <p:spPr>
+              <a:xfrm>
+                <a:off x="5457429" y="3420394"/>
+                <a:ext cx="2269440" cy="343080"/>
+              </a:xfrm>
+              <a:prstGeom prst="rect">
+                <a:avLst/>
+              </a:prstGeom>
+            </p:spPr>
+          </p:pic>
+        </mc:Fallback>
+      </mc:AlternateContent>
+    </p:spTree>
+    <p:extLst>
+      <p:ext uri="{BB962C8B-B14F-4D97-AF65-F5344CB8AC3E}">
+        <p14:creationId xmlns:p14="http://schemas.microsoft.com/office/powerpoint/2010/main" val="3093067597"/>
       </p:ext>
     </p:extLst>
   </p:cSld>
@@ -8658,15 +8405,6 @@
 </file>
 
 <file path=customXml/item1.xml><?xml version="1.0" encoding="utf-8"?>
-<?mso-contentType ?>
-<FormTemplates xmlns="http://schemas.microsoft.com/sharepoint/v3/contenttype/forms">
-  <Display>DocumentLibraryForm</Display>
-  <Edit>DocumentLibraryForm</Edit>
-  <New>DocumentLibraryForm</New>
-</FormTemplates>
-</file>
-
-<file path=customXml/item2.xml><?xml version="1.0" encoding="utf-8"?>
 <ct:contentTypeSchema xmlns:ct="http://schemas.microsoft.com/office/2006/metadata/contentType" xmlns:ma="http://schemas.microsoft.com/office/2006/metadata/properties/metaAttributes" ct:_="" ma:_="" ma:contentTypeName="Document" ma:contentTypeID="0x0101004285D81DBE5F5A448E892B34D6B8CF20" ma:contentTypeVersion="2" ma:contentTypeDescription="Create a new document." ma:contentTypeScope="" ma:versionID="026ccaf10de5d9915dfa48c6db16b59b">
   <xsd:schema xmlns:xsd="http://www.w3.org/2001/XMLSchema" xmlns:xs="http://www.w3.org/2001/XMLSchema" xmlns:p="http://schemas.microsoft.com/office/2006/metadata/properties" xmlns:ns2="08600313-7276-4ca7-b5d3-7d86193ee0ac" targetNamespace="http://schemas.microsoft.com/office/2006/metadata/properties" ma:root="true" ma:fieldsID="c887e4ee215f388544e22a2030d7ea35" ns2:_="">
     <xsd:import namespace="08600313-7276-4ca7-b5d3-7d86193ee0ac"/>
@@ -8798,6 +8536,15 @@
 </ct:contentTypeSchema>
 </file>
 
+<file path=customXml/item2.xml><?xml version="1.0" encoding="utf-8"?>
+<?mso-contentType ?>
+<FormTemplates xmlns="http://schemas.microsoft.com/sharepoint/v3/contenttype/forms">
+  <Display>DocumentLibraryForm</Display>
+  <Edit>DocumentLibraryForm</Edit>
+  <New>DocumentLibraryForm</New>
+</FormTemplates>
+</file>
+
 <file path=customXml/item3.xml><?xml version="1.0" encoding="utf-8"?>
 <p:properties xmlns:p="http://schemas.microsoft.com/office/2006/metadata/properties" xmlns:xsi="http://www.w3.org/2001/XMLSchema-instance" xmlns:pc="http://schemas.microsoft.com/office/infopath/2007/PartnerControls">
   <documentManagement/>
@@ -8805,14 +8552,6 @@
 </file>
 
 <file path=customXml/itemProps1.xml><?xml version="1.0" encoding="utf-8"?>
-<ds:datastoreItem xmlns:ds="http://schemas.openxmlformats.org/officeDocument/2006/customXml" ds:itemID="{91B7F2D7-28F4-40DC-BF4D-A63582936AC7}">
-  <ds:schemaRefs>
-    <ds:schemaRef ds:uri="http://schemas.microsoft.com/sharepoint/v3/contenttype/forms"/>
-  </ds:schemaRefs>
-</ds:datastoreItem>
-</file>
-
-<file path=customXml/itemProps2.xml><?xml version="1.0" encoding="utf-8"?>
 <ds:datastoreItem xmlns:ds="http://schemas.openxmlformats.org/officeDocument/2006/customXml" ds:itemID="{86AFFBF5-1744-4DD8-AF35-1BECDBB21948}">
   <ds:schemaRefs>
     <ds:schemaRef ds:uri="http://schemas.microsoft.com/office/2006/metadata/contentType"/>
@@ -8830,6 +8569,14 @@
 </ds:datastoreItem>
 </file>
 
+<file path=customXml/itemProps2.xml><?xml version="1.0" encoding="utf-8"?>
+<ds:datastoreItem xmlns:ds="http://schemas.openxmlformats.org/officeDocument/2006/customXml" ds:itemID="{91B7F2D7-28F4-40DC-BF4D-A63582936AC7}">
+  <ds:schemaRefs>
+    <ds:schemaRef ds:uri="http://schemas.microsoft.com/sharepoint/v3/contenttype/forms"/>
+  </ds:schemaRefs>
+</ds:datastoreItem>
+</file>
+
 <file path=customXml/itemProps3.xml><?xml version="1.0" encoding="utf-8"?>
 <ds:datastoreItem xmlns:ds="http://schemas.openxmlformats.org/officeDocument/2006/customXml" ds:itemID="{4CB9D0C4-1816-48BB-B7D3-B65D006E1708}">
   <ds:schemaRefs>

--- a/ClassMaterials/MapsAndObjectIntro/Slides/Part1-ObjectIntro.pptx
+++ b/ClassMaterials/MapsAndObjectIntro/Slides/Part1-ObjectIntro.pptx
@@ -4699,9 +4699,16 @@
             <p:ph idx="1"/>
           </p:nvPr>
         </p:nvSpPr>
-        <p:spPr/>
-        <p:txBody>
-          <a:bodyPr/>
+        <p:spPr>
+          <a:xfrm>
+            <a:off x="457200" y="1600200"/>
+            <a:ext cx="8229600" cy="5112327"/>
+          </a:xfrm>
+        </p:spPr>
+        <p:txBody>
+          <a:bodyPr>
+            <a:normAutofit lnSpcReduction="10000"/>
+          </a:bodyPr>
           <a:lstStyle/>
           <a:p>
             <a:r>
@@ -4757,12 +4764,37 @@
           <a:p>
             <a:r>
               <a:rPr lang="en-US" dirty="0"/>
-              <a:t>Make these classes work with the tests provided in </a:t>
-            </a:r>
-            <a:r>
-              <a:rPr lang="en-US" dirty="0" err="1"/>
-              <a:t>ClassTests.java</a:t>
-            </a:r>
+              <a:t>Make these classes work with the tests provided in ClassTests.java </a:t>
+            </a:r>
+          </a:p>
+          <a:p>
+            <a:pPr lvl="1"/>
+            <a:r>
+              <a:rPr lang="en-US" dirty="0"/>
+              <a:t>Need to uncomment ClassTests.java: </a:t>
+            </a:r>
+          </a:p>
+          <a:p>
+            <a:pPr lvl="2"/>
+            <a:r>
+              <a:rPr lang="en-US" dirty="0" err="1">
+                <a:latin typeface="Consolas" panose="020B0609020204030204" pitchFamily="49" charset="0"/>
+              </a:rPr>
+              <a:t>Ctrl+A</a:t>
+            </a:r>
+            <a:r>
+              <a:rPr lang="en-US" dirty="0"/>
+              <a:t>, then </a:t>
+            </a:r>
+            <a:r>
+              <a:rPr lang="en-US" dirty="0">
+                <a:latin typeface="Consolas" panose="020B0609020204030204" pitchFamily="49" charset="0"/>
+              </a:rPr>
+              <a:t>Ctrl+/</a:t>
+            </a:r>
+          </a:p>
+          <a:p>
+            <a:pPr lvl="1"/>
             <a:endParaRPr lang="en-US" dirty="0"/>
           </a:p>
           <a:p>
@@ -6544,7 +6576,7 @@
           </a:ln>
           <a:extLst>
             <a:ext uri="{C572A759-6A51-4108-AA02-DFA0A04FC94B}">
-              <ma14:wrappingTextBoxFlag xmlns:ma14="http://schemas.microsoft.com/office/mac/drawingml/2011/main" xmlns="" val="1"/>
+              <ma14:wrappingTextBoxFlag xmlns="" xmlns:ma14="http://schemas.microsoft.com/office/mac/drawingml/2011/main" val="1"/>
             </a:ext>
           </a:extLst>
         </p:spPr>
@@ -6766,7 +6798,7 @@
               <a:effectLst/>
               <a:extLst>
                 <a:ext uri="{C572A759-6A51-4108-AA02-DFA0A04FC94B}">
-                  <ma14:wrappingTextBoxFlag xmlns:ma14="http://schemas.microsoft.com/office/mac/drawingml/2011/main" xmlns="" val="1"/>
+                  <ma14:wrappingTextBoxFlag xmlns="" xmlns:ma14="http://schemas.microsoft.com/office/mac/drawingml/2011/main" val="1"/>
                 </a:ext>
               </a:extLst>
             </p:spPr>
@@ -6945,7 +6977,7 @@
               <a:effectLst/>
               <a:extLst>
                 <a:ext uri="{C572A759-6A51-4108-AA02-DFA0A04FC94B}">
-                  <ma14:wrappingTextBoxFlag xmlns:ma14="http://schemas.microsoft.com/office/mac/drawingml/2011/main" xmlns="" val="1"/>
+                  <ma14:wrappingTextBoxFlag xmlns="" xmlns:ma14="http://schemas.microsoft.com/office/mac/drawingml/2011/main" val="1"/>
                 </a:ext>
               </a:extLst>
             </p:spPr>
@@ -7115,7 +7147,7 @@
               <a:effectLst/>
               <a:extLst>
                 <a:ext uri="{C572A759-6A51-4108-AA02-DFA0A04FC94B}">
-                  <ma14:wrappingTextBoxFlag xmlns:ma14="http://schemas.microsoft.com/office/mac/drawingml/2011/main" xmlns="" val="1"/>
+                  <ma14:wrappingTextBoxFlag xmlns="" xmlns:ma14="http://schemas.microsoft.com/office/mac/drawingml/2011/main" val="1"/>
                 </a:ext>
               </a:extLst>
             </p:spPr>
@@ -7303,7 +7335,7 @@
               <a:effectLst/>
               <a:extLst>
                 <a:ext uri="{C572A759-6A51-4108-AA02-DFA0A04FC94B}">
-                  <ma14:wrappingTextBoxFlag xmlns:ma14="http://schemas.microsoft.com/office/mac/drawingml/2011/main" xmlns="" val="1"/>
+                  <ma14:wrappingTextBoxFlag xmlns="" xmlns:ma14="http://schemas.microsoft.com/office/mac/drawingml/2011/main" val="1"/>
                 </a:ext>
               </a:extLst>
             </p:spPr>
@@ -7448,7 +7480,7 @@
             <a:effectLst/>
             <a:extLst>
               <a:ext uri="{C572A759-6A51-4108-AA02-DFA0A04FC94B}">
-                <ma14:wrappingTextBoxFlag xmlns:ma14="http://schemas.microsoft.com/office/mac/drawingml/2011/main" xmlns="" val="1"/>
+                <ma14:wrappingTextBoxFlag xmlns="" xmlns:ma14="http://schemas.microsoft.com/office/mac/drawingml/2011/main" val="1"/>
               </a:ext>
             </a:extLst>
           </p:spPr>
@@ -7598,14 +7630,7 @@
             <a:pPr lvl="1"/>
             <a:r>
               <a:rPr lang="en-US" dirty="0"/>
-              <a:t>Have Eclipse help us</a:t>
-            </a:r>
-          </a:p>
-          <a:p>
-            <a:pPr lvl="1"/>
-            <a:r>
-              <a:rPr lang="en-US" dirty="0"/>
-              <a:t>When you’re done and it works, solve the last quiz question</a:t>
+              <a:t>Have IntelliJ help us</a:t>
             </a:r>
           </a:p>
           <a:p>
@@ -8405,6 +8430,15 @@
 </file>
 
 <file path=customXml/item1.xml><?xml version="1.0" encoding="utf-8"?>
+<?mso-contentType ?>
+<FormTemplates xmlns="http://schemas.microsoft.com/sharepoint/v3/contenttype/forms">
+  <Display>DocumentLibraryForm</Display>
+  <Edit>DocumentLibraryForm</Edit>
+  <New>DocumentLibraryForm</New>
+</FormTemplates>
+</file>
+
+<file path=customXml/item2.xml><?xml version="1.0" encoding="utf-8"?>
 <ct:contentTypeSchema xmlns:ct="http://schemas.microsoft.com/office/2006/metadata/contentType" xmlns:ma="http://schemas.microsoft.com/office/2006/metadata/properties/metaAttributes" ct:_="" ma:_="" ma:contentTypeName="Document" ma:contentTypeID="0x0101004285D81DBE5F5A448E892B34D6B8CF20" ma:contentTypeVersion="2" ma:contentTypeDescription="Create a new document." ma:contentTypeScope="" ma:versionID="026ccaf10de5d9915dfa48c6db16b59b">
   <xsd:schema xmlns:xsd="http://www.w3.org/2001/XMLSchema" xmlns:xs="http://www.w3.org/2001/XMLSchema" xmlns:p="http://schemas.microsoft.com/office/2006/metadata/properties" xmlns:ns2="08600313-7276-4ca7-b5d3-7d86193ee0ac" targetNamespace="http://schemas.microsoft.com/office/2006/metadata/properties" ma:root="true" ma:fieldsID="c887e4ee215f388544e22a2030d7ea35" ns2:_="">
     <xsd:import namespace="08600313-7276-4ca7-b5d3-7d86193ee0ac"/>
@@ -8536,15 +8570,6 @@
 </ct:contentTypeSchema>
 </file>
 
-<file path=customXml/item2.xml><?xml version="1.0" encoding="utf-8"?>
-<?mso-contentType ?>
-<FormTemplates xmlns="http://schemas.microsoft.com/sharepoint/v3/contenttype/forms">
-  <Display>DocumentLibraryForm</Display>
-  <Edit>DocumentLibraryForm</Edit>
-  <New>DocumentLibraryForm</New>
-</FormTemplates>
-</file>
-
 <file path=customXml/item3.xml><?xml version="1.0" encoding="utf-8"?>
 <p:properties xmlns:p="http://schemas.microsoft.com/office/2006/metadata/properties" xmlns:xsi="http://www.w3.org/2001/XMLSchema-instance" xmlns:pc="http://schemas.microsoft.com/office/infopath/2007/PartnerControls">
   <documentManagement/>
@@ -8552,6 +8577,14 @@
 </file>
 
 <file path=customXml/itemProps1.xml><?xml version="1.0" encoding="utf-8"?>
+<ds:datastoreItem xmlns:ds="http://schemas.openxmlformats.org/officeDocument/2006/customXml" ds:itemID="{91B7F2D7-28F4-40DC-BF4D-A63582936AC7}">
+  <ds:schemaRefs>
+    <ds:schemaRef ds:uri="http://schemas.microsoft.com/sharepoint/v3/contenttype/forms"/>
+  </ds:schemaRefs>
+</ds:datastoreItem>
+</file>
+
+<file path=customXml/itemProps2.xml><?xml version="1.0" encoding="utf-8"?>
 <ds:datastoreItem xmlns:ds="http://schemas.openxmlformats.org/officeDocument/2006/customXml" ds:itemID="{86AFFBF5-1744-4DD8-AF35-1BECDBB21948}">
   <ds:schemaRefs>
     <ds:schemaRef ds:uri="http://schemas.microsoft.com/office/2006/metadata/contentType"/>
@@ -8569,14 +8602,6 @@
 </ds:datastoreItem>
 </file>
 
-<file path=customXml/itemProps2.xml><?xml version="1.0" encoding="utf-8"?>
-<ds:datastoreItem xmlns:ds="http://schemas.openxmlformats.org/officeDocument/2006/customXml" ds:itemID="{91B7F2D7-28F4-40DC-BF4D-A63582936AC7}">
-  <ds:schemaRefs>
-    <ds:schemaRef ds:uri="http://schemas.microsoft.com/sharepoint/v3/contenttype/forms"/>
-  </ds:schemaRefs>
-</ds:datastoreItem>
-</file>
-
 <file path=customXml/itemProps3.xml><?xml version="1.0" encoding="utf-8"?>
 <ds:datastoreItem xmlns:ds="http://schemas.openxmlformats.org/officeDocument/2006/customXml" ds:itemID="{4CB9D0C4-1816-48BB-B7D3-B65D006E1708}">
   <ds:schemaRefs>
